--- a/docx/proposal/工业轴承设备剩余寿命预测系统的实现-开题ppt-周逸进.pptx
+++ b/docx/proposal/工业轴承设备剩余寿命预测系统的实现-开题ppt-周逸进.pptx
@@ -9025,7 +9025,7 @@
                 <a:latin typeface="Arial Black" panose="020B0A04020102020204"/>
                 <a:cs typeface="Arial Black" panose="020B0A04020102020204"/>
               </a:rPr>
-              <a:t>NASA</a:t>
+              <a:t>XJTU-SY</a:t>
             </a:r>
             <a:r>
               <a:rPr sz="1100" spc="50" dirty="0">
@@ -9039,7 +9039,7 @@
                 <a:latin typeface="Arial Black" panose="020B0A04020102020204"/>
                 <a:cs typeface="Arial Black" panose="020B0A04020102020204"/>
               </a:rPr>
-              <a:t>Turbofan</a:t>
+              <a:t>PHM2012/FEMTO</a:t>
             </a:r>
             <a:r>
               <a:rPr sz="1100" spc="55" dirty="0">
@@ -9053,7 +9053,7 @@
                 <a:latin typeface="Arial Black" panose="020B0A04020102020204"/>
                 <a:cs typeface="Arial Black" panose="020B0A04020102020204"/>
               </a:rPr>
-              <a:t>Engine</a:t>
+              <a:t>轴承</a:t>
             </a:r>
             <a:r>
               <a:rPr sz="1100" spc="55" dirty="0">
@@ -9067,7 +9067,7 @@
                 <a:latin typeface="Arial Black" panose="020B0A04020102020204"/>
                 <a:cs typeface="Arial Black" panose="020B0A04020102020204"/>
               </a:rPr>
-              <a:t>Degradation</a:t>
+              <a:t>退化</a:t>
             </a:r>
             <a:r>
               <a:rPr sz="1100" spc="55" dirty="0">
@@ -9092,7 +9092,7 @@
                 <a:latin typeface="Arial MT"/>
                 <a:cs typeface="Arial MT"/>
               </a:rPr>
-              <a:t>UCI</a:t>
+              <a:t>公开数据</a:t>
             </a:r>
             <a:r>
               <a:rPr sz="1100" spc="-20" dirty="0"/>
